--- a/raw/Presentations/2026/设计模式的应用.pptx
+++ b/raw/Presentations/2026/设计模式的应用.pptx
@@ -1133,6 +1133,145 @@
             <a:r>
               <a:t>模式组合（7 分钟）：逐个回指六种需求，让学生看到模式不是独立插件。中心的 ExperimentRunner 稳定，周围每个扩展点只承担一种变化。</a:t>
             </a:r>
+          </a:p>
+          <a:p/>
+          <a:p>
+            <a:r>
+              <a:rPr lang="en-US" altLang="zh-CN"/>
+              <a:t>DatasetSource source =</a:t>
+            </a:r>
+            <a:endParaRPr lang="en-US" altLang="zh-CN"/>
+          </a:p>
+          <a:p>
+            <a:r>
+              <a:rPr lang="en-US" altLang="zh-CN"/>
+              <a:t>    DatasetSourceFactory.create(config);</a:t>
+            </a:r>
+            <a:endParaRPr lang="en-US" altLang="zh-CN"/>
+          </a:p>
+          <a:p>
+            <a:endParaRPr lang="en-US" altLang="zh-CN"/>
+          </a:p>
+          <a:p>
+            <a:r>
+              <a:rPr lang="en-US" altLang="zh-CN"/>
+              <a:t>TrainingStrategy strategy =</a:t>
+            </a:r>
+            <a:endParaRPr lang="en-US" altLang="zh-CN"/>
+          </a:p>
+          <a:p>
+            <a:r>
+              <a:rPr lang="en-US" altLang="zh-CN"/>
+              <a:t>    TrainingStrategyFactory.create(config);</a:t>
+            </a:r>
+            <a:endParaRPr lang="en-US" altLang="zh-CN"/>
+          </a:p>
+          <a:p>
+            <a:endParaRPr lang="en-US" altLang="zh-CN"/>
+          </a:p>
+          <a:p>
+            <a:r>
+              <a:rPr lang="en-US" altLang="zh-CN"/>
+              <a:t>Trainer trainer =</a:t>
+            </a:r>
+            <a:endParaRPr lang="en-US" altLang="zh-CN"/>
+          </a:p>
+          <a:p>
+            <a:r>
+              <a:rPr lang="en-US" altLang="zh-CN"/>
+              <a:t>    new Trainer(strategy);</a:t>
+            </a:r>
+            <a:endParaRPr lang="en-US" altLang="zh-CN"/>
+          </a:p>
+          <a:p>
+            <a:endParaRPr lang="en-US" altLang="zh-CN"/>
+          </a:p>
+          <a:p>
+            <a:r>
+              <a:rPr lang="en-US" altLang="zh-CN"/>
+              <a:t>Runner runner =</a:t>
+            </a:r>
+            <a:endParaRPr lang="en-US" altLang="zh-CN"/>
+          </a:p>
+          <a:p>
+            <a:r>
+              <a:rPr lang="en-US" altLang="zh-CN"/>
+              <a:t>    RunnerFactory.create(</a:t>
+            </a:r>
+            <a:endParaRPr lang="en-US" altLang="zh-CN"/>
+          </a:p>
+          <a:p>
+            <a:r>
+              <a:rPr lang="en-US" altLang="zh-CN"/>
+              <a:t>        config,</a:t>
+            </a:r>
+            <a:endParaRPr lang="en-US" altLang="zh-CN"/>
+          </a:p>
+          <a:p>
+            <a:r>
+              <a:rPr lang="en-US" altLang="zh-CN"/>
+              <a:t>        source,</a:t>
+            </a:r>
+            <a:endParaRPr lang="en-US" altLang="zh-CN"/>
+          </a:p>
+          <a:p>
+            <a:r>
+              <a:rPr lang="en-US" altLang="zh-CN"/>
+              <a:t>        trainer</a:t>
+            </a:r>
+            <a:endParaRPr lang="en-US" altLang="zh-CN"/>
+          </a:p>
+          <a:p>
+            <a:r>
+              <a:rPr lang="en-US" altLang="zh-CN"/>
+              <a:t>    );</a:t>
+            </a:r>
+            <a:endParaRPr lang="en-US" altLang="zh-CN"/>
+          </a:p>
+          <a:p>
+            <a:endParaRPr lang="en-US" altLang="zh-CN"/>
+          </a:p>
+          <a:p>
+            <a:r>
+              <a:rPr lang="en-US" altLang="zh-CN"/>
+              <a:t>ExperimentRunner experiment =</a:t>
+            </a:r>
+            <a:endParaRPr lang="en-US" altLang="zh-CN"/>
+          </a:p>
+          <a:p>
+            <a:r>
+              <a:rPr lang="en-US" altLang="zh-CN"/>
+              <a:t>    new ExperimentRunner(</a:t>
+            </a:r>
+            <a:endParaRPr lang="en-US" altLang="zh-CN"/>
+          </a:p>
+          <a:p>
+            <a:r>
+              <a:rPr lang="en-US" altLang="zh-CN"/>
+              <a:t>        config.experimentId(),</a:t>
+            </a:r>
+            <a:endParaRPr lang="en-US" altLang="zh-CN"/>
+          </a:p>
+          <a:p>
+            <a:r>
+              <a:rPr lang="en-US" altLang="zh-CN"/>
+              <a:t>        runner,</a:t>
+            </a:r>
+            <a:endParaRPr lang="en-US" altLang="zh-CN"/>
+          </a:p>
+          <a:p>
+            <a:r>
+              <a:rPr lang="en-US" altLang="zh-CN"/>
+              <a:t>        events</a:t>
+            </a:r>
+            <a:endParaRPr lang="en-US" altLang="zh-CN"/>
+          </a:p>
+          <a:p>
+            <a:r>
+              <a:rPr lang="en-US" altLang="zh-CN"/>
+              <a:t>    );</a:t>
+            </a:r>
+            <a:endParaRPr lang="en-US" altLang="zh-CN"/>
           </a:p>
           <a:p/>
           <a:p>
